--- a/presentation/Project_Review_Presentation.pptx
+++ b/presentation/Project_Review_Presentation.pptx
@@ -5,20 +5,20 @@
     <p:sldMasterId id="2147483648" r:id="rId1"/>
   </p:sldMasterIdLst>
   <p:sldIdLst>
-    <p:sldId id="256" r:id="rId7"/>
-    <p:sldId id="257" r:id="rId8"/>
-    <p:sldId id="258" r:id="rId9"/>
-    <p:sldId id="259" r:id="rId10"/>
-    <p:sldId id="260" r:id="rId11"/>
-    <p:sldId id="261" r:id="rId12"/>
-    <p:sldId id="262" r:id="rId13"/>
-    <p:sldId id="263" r:id="rId14"/>
-    <p:sldId id="264" r:id="rId15"/>
-    <p:sldId id="265" r:id="rId16"/>
-    <p:sldId id="266" r:id="rId17"/>
-    <p:sldId id="267" r:id="rId18"/>
+    <p:sldId id="256" r:id="rId2"/>
+    <p:sldId id="257" r:id="rId3"/>
+    <p:sldId id="258" r:id="rId4"/>
+    <p:sldId id="259" r:id="rId5"/>
+    <p:sldId id="260" r:id="rId6"/>
+    <p:sldId id="261" r:id="rId7"/>
+    <p:sldId id="262" r:id="rId8"/>
+    <p:sldId id="263" r:id="rId9"/>
+    <p:sldId id="264" r:id="rId10"/>
+    <p:sldId id="265" r:id="rId11"/>
+    <p:sldId id="266" r:id="rId12"/>
+    <p:sldId id="267" r:id="rId13"/>
   </p:sldIdLst>
-  <p:sldSz cx="12191695" cy="6858000" type="screen4x3"/>
+  <p:sldSz cx="12192000" cy="6858000"/>
   <p:notesSz cx="6858000" cy="9144000"/>
   <p:defaultTextStyle>
     <a:defPPr>
@@ -115,6 +115,22 @@
       </a:defRPr>
     </a:lvl9pPr>
   </p:defaultTextStyle>
+  <p:extLst>
+    <p:ext uri="{EFAFB233-063F-42B5-8137-9DF3F51BA10A}">
+      <p15:sldGuideLst xmlns:p15="http://schemas.microsoft.com/office/powerpoint/2012/main">
+        <p15:guide id="1" orient="horz" pos="2160">
+          <p15:clr>
+            <a:srgbClr val="A4A3A4"/>
+          </p15:clr>
+        </p15:guide>
+        <p15:guide id="2" pos="2880">
+          <p15:clr>
+            <a:srgbClr val="A4A3A4"/>
+          </p15:clr>
+        </p15:guide>
+      </p15:sldGuideLst>
+    </p:ext>
+  </p:extLst>
 </p:presentation>
 </file>
 
@@ -156,10 +172,9 @@
           <a:lstStyle/>
           <a:p>
             <a:r>
-              <a:rPr lang="en-US" smtClean="0"/>
+              <a:rPr lang="en-US"/>
               <a:t>Click to edit Master title style</a:t>
             </a:r>
-            <a:endParaRPr lang="en-US"/>
           </a:p>
         </p:txBody>
       </p:sp>
@@ -275,10 +290,9 @@
           </a:lstStyle>
           <a:p>
             <a:r>
-              <a:rPr lang="en-US" smtClean="0"/>
+              <a:rPr lang="en-US"/>
               <a:t>Click to edit Master subtitle style</a:t>
             </a:r>
-            <a:endParaRPr lang="en-US"/>
           </a:p>
         </p:txBody>
       </p:sp>
@@ -299,7 +313,7 @@
           <a:p>
             <a:fld id="{5BCAD085-E8A6-8845-BD4E-CB4CCA059FC4}" type="datetimeFigureOut">
               <a:rPr lang="en-US" smtClean="0"/>
-              <a:t>1/27/13</a:t>
+              <a:t>15/10/26</a:t>
             </a:fld>
             <a:endParaRPr lang="en-US"/>
           </a:p>
@@ -393,10 +407,9 @@
           <a:lstStyle/>
           <a:p>
             <a:r>
-              <a:rPr lang="en-US" smtClean="0"/>
+              <a:rPr lang="en-US"/>
               <a:t>Click to edit Master title style</a:t>
             </a:r>
-            <a:endParaRPr lang="en-US"/>
           </a:p>
         </p:txBody>
       </p:sp>
@@ -417,38 +430,37 @@
           <a:p>
             <a:pPr lvl="0"/>
             <a:r>
-              <a:rPr lang="en-US" smtClean="0"/>
+              <a:rPr lang="en-US"/>
               <a:t>Click to edit Master text styles</a:t>
             </a:r>
           </a:p>
           <a:p>
             <a:pPr lvl="1"/>
             <a:r>
-              <a:rPr lang="en-US" smtClean="0"/>
+              <a:rPr lang="en-US"/>
               <a:t>Second level</a:t>
             </a:r>
           </a:p>
           <a:p>
             <a:pPr lvl="2"/>
             <a:r>
-              <a:rPr lang="en-US" smtClean="0"/>
+              <a:rPr lang="en-US"/>
               <a:t>Third level</a:t>
             </a:r>
           </a:p>
           <a:p>
             <a:pPr lvl="3"/>
             <a:r>
-              <a:rPr lang="en-US" smtClean="0"/>
+              <a:rPr lang="en-US"/>
               <a:t>Fourth level</a:t>
             </a:r>
           </a:p>
           <a:p>
             <a:pPr lvl="4"/>
             <a:r>
-              <a:rPr lang="en-US" smtClean="0"/>
+              <a:rPr lang="en-US"/>
               <a:t>Fifth level</a:t>
             </a:r>
-            <a:endParaRPr lang="en-US"/>
           </a:p>
         </p:txBody>
       </p:sp>
@@ -469,7 +481,7 @@
           <a:p>
             <a:fld id="{5BCAD085-E8A6-8845-BD4E-CB4CCA059FC4}" type="datetimeFigureOut">
               <a:rPr lang="en-US" smtClean="0"/>
-              <a:t>1/27/13</a:t>
+              <a:t>15/10/26</a:t>
             </a:fld>
             <a:endParaRPr lang="en-US"/>
           </a:p>
@@ -568,10 +580,9 @@
           <a:lstStyle/>
           <a:p>
             <a:r>
-              <a:rPr lang="en-US" smtClean="0"/>
+              <a:rPr lang="en-US"/>
               <a:t>Click to edit Master title style</a:t>
             </a:r>
-            <a:endParaRPr lang="en-US"/>
           </a:p>
         </p:txBody>
       </p:sp>
@@ -597,38 +608,37 @@
           <a:p>
             <a:pPr lvl="0"/>
             <a:r>
-              <a:rPr lang="en-US" smtClean="0"/>
+              <a:rPr lang="en-US"/>
               <a:t>Click to edit Master text styles</a:t>
             </a:r>
           </a:p>
           <a:p>
             <a:pPr lvl="1"/>
             <a:r>
-              <a:rPr lang="en-US" smtClean="0"/>
+              <a:rPr lang="en-US"/>
               <a:t>Second level</a:t>
             </a:r>
           </a:p>
           <a:p>
             <a:pPr lvl="2"/>
             <a:r>
-              <a:rPr lang="en-US" smtClean="0"/>
+              <a:rPr lang="en-US"/>
               <a:t>Third level</a:t>
             </a:r>
           </a:p>
           <a:p>
             <a:pPr lvl="3"/>
             <a:r>
-              <a:rPr lang="en-US" smtClean="0"/>
+              <a:rPr lang="en-US"/>
               <a:t>Fourth level</a:t>
             </a:r>
           </a:p>
           <a:p>
             <a:pPr lvl="4"/>
             <a:r>
-              <a:rPr lang="en-US" smtClean="0"/>
+              <a:rPr lang="en-US"/>
               <a:t>Fifth level</a:t>
             </a:r>
-            <a:endParaRPr lang="en-US"/>
           </a:p>
         </p:txBody>
       </p:sp>
@@ -649,7 +659,7 @@
           <a:p>
             <a:fld id="{5BCAD085-E8A6-8845-BD4E-CB4CCA059FC4}" type="datetimeFigureOut">
               <a:rPr lang="en-US" smtClean="0"/>
-              <a:t>1/27/13</a:t>
+              <a:t>15/10/26</a:t>
             </a:fld>
             <a:endParaRPr lang="en-US"/>
           </a:p>
@@ -743,10 +753,9 @@
           <a:lstStyle/>
           <a:p>
             <a:r>
-              <a:rPr lang="en-US" smtClean="0"/>
+              <a:rPr lang="en-US"/>
               <a:t>Click to edit Master title style</a:t>
             </a:r>
-            <a:endParaRPr lang="en-US"/>
           </a:p>
         </p:txBody>
       </p:sp>
@@ -767,38 +776,37 @@
           <a:p>
             <a:pPr lvl="0"/>
             <a:r>
-              <a:rPr lang="en-US" smtClean="0"/>
+              <a:rPr lang="en-US"/>
               <a:t>Click to edit Master text styles</a:t>
             </a:r>
           </a:p>
           <a:p>
             <a:pPr lvl="1"/>
             <a:r>
-              <a:rPr lang="en-US" smtClean="0"/>
+              <a:rPr lang="en-US"/>
               <a:t>Second level</a:t>
             </a:r>
           </a:p>
           <a:p>
             <a:pPr lvl="2"/>
             <a:r>
-              <a:rPr lang="en-US" smtClean="0"/>
+              <a:rPr lang="en-US"/>
               <a:t>Third level</a:t>
             </a:r>
           </a:p>
           <a:p>
             <a:pPr lvl="3"/>
             <a:r>
-              <a:rPr lang="en-US" smtClean="0"/>
+              <a:rPr lang="en-US"/>
               <a:t>Fourth level</a:t>
             </a:r>
           </a:p>
           <a:p>
             <a:pPr lvl="4"/>
             <a:r>
-              <a:rPr lang="en-US" smtClean="0"/>
+              <a:rPr lang="en-US"/>
               <a:t>Fifth level</a:t>
             </a:r>
-            <a:endParaRPr lang="en-US"/>
           </a:p>
         </p:txBody>
       </p:sp>
@@ -819,7 +827,7 @@
           <a:p>
             <a:fld id="{5BCAD085-E8A6-8845-BD4E-CB4CCA059FC4}" type="datetimeFigureOut">
               <a:rPr lang="en-US" smtClean="0"/>
-              <a:t>1/27/13</a:t>
+              <a:t>15/10/26</a:t>
             </a:fld>
             <a:endParaRPr lang="en-US"/>
           </a:p>
@@ -922,10 +930,9 @@
           </a:lstStyle>
           <a:p>
             <a:r>
-              <a:rPr lang="en-US" smtClean="0"/>
+              <a:rPr lang="en-US"/>
               <a:t>Click to edit Master title style</a:t>
             </a:r>
-            <a:endParaRPr lang="en-US"/>
           </a:p>
         </p:txBody>
       </p:sp>
@@ -1042,7 +1049,7 @@
           <a:p>
             <a:pPr lvl="0"/>
             <a:r>
-              <a:rPr lang="en-US" smtClean="0"/>
+              <a:rPr lang="en-US"/>
               <a:t>Click to edit Master text styles</a:t>
             </a:r>
           </a:p>
@@ -1065,7 +1072,7 @@
           <a:p>
             <a:fld id="{5BCAD085-E8A6-8845-BD4E-CB4CCA059FC4}" type="datetimeFigureOut">
               <a:rPr lang="en-US" smtClean="0"/>
-              <a:t>1/27/13</a:t>
+              <a:t>15/10/26</a:t>
             </a:fld>
             <a:endParaRPr lang="en-US"/>
           </a:p>
@@ -1159,10 +1166,9 @@
           <a:lstStyle/>
           <a:p>
             <a:r>
-              <a:rPr lang="en-US" smtClean="0"/>
+              <a:rPr lang="en-US"/>
               <a:t>Click to edit Master title style</a:t>
             </a:r>
-            <a:endParaRPr lang="en-US"/>
           </a:p>
         </p:txBody>
       </p:sp>
@@ -1216,38 +1222,37 @@
           <a:p>
             <a:pPr lvl="0"/>
             <a:r>
-              <a:rPr lang="en-US" smtClean="0"/>
+              <a:rPr lang="en-US"/>
               <a:t>Click to edit Master text styles</a:t>
             </a:r>
           </a:p>
           <a:p>
             <a:pPr lvl="1"/>
             <a:r>
-              <a:rPr lang="en-US" smtClean="0"/>
+              <a:rPr lang="en-US"/>
               <a:t>Second level</a:t>
             </a:r>
           </a:p>
           <a:p>
             <a:pPr lvl="2"/>
             <a:r>
-              <a:rPr lang="en-US" smtClean="0"/>
+              <a:rPr lang="en-US"/>
               <a:t>Third level</a:t>
             </a:r>
           </a:p>
           <a:p>
             <a:pPr lvl="3"/>
             <a:r>
-              <a:rPr lang="en-US" smtClean="0"/>
+              <a:rPr lang="en-US"/>
               <a:t>Fourth level</a:t>
             </a:r>
           </a:p>
           <a:p>
             <a:pPr lvl="4"/>
             <a:r>
-              <a:rPr lang="en-US" smtClean="0"/>
+              <a:rPr lang="en-US"/>
               <a:t>Fifth level</a:t>
             </a:r>
-            <a:endParaRPr lang="en-US"/>
           </a:p>
         </p:txBody>
       </p:sp>
@@ -1301,38 +1306,37 @@
           <a:p>
             <a:pPr lvl="0"/>
             <a:r>
-              <a:rPr lang="en-US" smtClean="0"/>
+              <a:rPr lang="en-US"/>
               <a:t>Click to edit Master text styles</a:t>
             </a:r>
           </a:p>
           <a:p>
             <a:pPr lvl="1"/>
             <a:r>
-              <a:rPr lang="en-US" smtClean="0"/>
+              <a:rPr lang="en-US"/>
               <a:t>Second level</a:t>
             </a:r>
           </a:p>
           <a:p>
             <a:pPr lvl="2"/>
             <a:r>
-              <a:rPr lang="en-US" smtClean="0"/>
+              <a:rPr lang="en-US"/>
               <a:t>Third level</a:t>
             </a:r>
           </a:p>
           <a:p>
             <a:pPr lvl="3"/>
             <a:r>
-              <a:rPr lang="en-US" smtClean="0"/>
+              <a:rPr lang="en-US"/>
               <a:t>Fourth level</a:t>
             </a:r>
           </a:p>
           <a:p>
             <a:pPr lvl="4"/>
             <a:r>
-              <a:rPr lang="en-US" smtClean="0"/>
+              <a:rPr lang="en-US"/>
               <a:t>Fifth level</a:t>
             </a:r>
-            <a:endParaRPr lang="en-US"/>
           </a:p>
         </p:txBody>
       </p:sp>
@@ -1353,7 +1357,7 @@
           <a:p>
             <a:fld id="{5BCAD085-E8A6-8845-BD4E-CB4CCA059FC4}" type="datetimeFigureOut">
               <a:rPr lang="en-US" smtClean="0"/>
-              <a:t>1/27/13</a:t>
+              <a:t>15/10/26</a:t>
             </a:fld>
             <a:endParaRPr lang="en-US"/>
           </a:p>
@@ -1451,10 +1455,9 @@
           </a:lstStyle>
           <a:p>
             <a:r>
-              <a:rPr lang="en-US" smtClean="0"/>
+              <a:rPr lang="en-US"/>
               <a:t>Click to edit Master title style</a:t>
             </a:r>
-            <a:endParaRPr lang="en-US"/>
           </a:p>
         </p:txBody>
       </p:sp>
@@ -1517,7 +1520,7 @@
           <a:p>
             <a:pPr lvl="0"/>
             <a:r>
-              <a:rPr lang="en-US" smtClean="0"/>
+              <a:rPr lang="en-US"/>
               <a:t>Click to edit Master text styles</a:t>
             </a:r>
           </a:p>
@@ -1573,38 +1576,37 @@
           <a:p>
             <a:pPr lvl="0"/>
             <a:r>
-              <a:rPr lang="en-US" smtClean="0"/>
+              <a:rPr lang="en-US"/>
               <a:t>Click to edit Master text styles</a:t>
             </a:r>
           </a:p>
           <a:p>
             <a:pPr lvl="1"/>
             <a:r>
-              <a:rPr lang="en-US" smtClean="0"/>
+              <a:rPr lang="en-US"/>
               <a:t>Second level</a:t>
             </a:r>
           </a:p>
           <a:p>
             <a:pPr lvl="2"/>
             <a:r>
-              <a:rPr lang="en-US" smtClean="0"/>
+              <a:rPr lang="en-US"/>
               <a:t>Third level</a:t>
             </a:r>
           </a:p>
           <a:p>
             <a:pPr lvl="3"/>
             <a:r>
-              <a:rPr lang="en-US" smtClean="0"/>
+              <a:rPr lang="en-US"/>
               <a:t>Fourth level</a:t>
             </a:r>
           </a:p>
           <a:p>
             <a:pPr lvl="4"/>
             <a:r>
-              <a:rPr lang="en-US" smtClean="0"/>
+              <a:rPr lang="en-US"/>
               <a:t>Fifth level</a:t>
             </a:r>
-            <a:endParaRPr lang="en-US"/>
           </a:p>
         </p:txBody>
       </p:sp>
@@ -1667,7 +1669,7 @@
           <a:p>
             <a:pPr lvl="0"/>
             <a:r>
-              <a:rPr lang="en-US" smtClean="0"/>
+              <a:rPr lang="en-US"/>
               <a:t>Click to edit Master text styles</a:t>
             </a:r>
           </a:p>
@@ -1723,38 +1725,37 @@
           <a:p>
             <a:pPr lvl="0"/>
             <a:r>
-              <a:rPr lang="en-US" smtClean="0"/>
+              <a:rPr lang="en-US"/>
               <a:t>Click to edit Master text styles</a:t>
             </a:r>
           </a:p>
           <a:p>
             <a:pPr lvl="1"/>
             <a:r>
-              <a:rPr lang="en-US" smtClean="0"/>
+              <a:rPr lang="en-US"/>
               <a:t>Second level</a:t>
             </a:r>
           </a:p>
           <a:p>
             <a:pPr lvl="2"/>
             <a:r>
-              <a:rPr lang="en-US" smtClean="0"/>
+              <a:rPr lang="en-US"/>
               <a:t>Third level</a:t>
             </a:r>
           </a:p>
           <a:p>
             <a:pPr lvl="3"/>
             <a:r>
-              <a:rPr lang="en-US" smtClean="0"/>
+              <a:rPr lang="en-US"/>
               <a:t>Fourth level</a:t>
             </a:r>
           </a:p>
           <a:p>
             <a:pPr lvl="4"/>
             <a:r>
-              <a:rPr lang="en-US" smtClean="0"/>
+              <a:rPr lang="en-US"/>
               <a:t>Fifth level</a:t>
             </a:r>
-            <a:endParaRPr lang="en-US"/>
           </a:p>
         </p:txBody>
       </p:sp>
@@ -1775,7 +1776,7 @@
           <a:p>
             <a:fld id="{5BCAD085-E8A6-8845-BD4E-CB4CCA059FC4}" type="datetimeFigureOut">
               <a:rPr lang="en-US" smtClean="0"/>
-              <a:t>1/27/13</a:t>
+              <a:t>15/10/26</a:t>
             </a:fld>
             <a:endParaRPr lang="en-US"/>
           </a:p>
@@ -1869,10 +1870,9 @@
           <a:lstStyle/>
           <a:p>
             <a:r>
-              <a:rPr lang="en-US" smtClean="0"/>
+              <a:rPr lang="en-US"/>
               <a:t>Click to edit Master title style</a:t>
             </a:r>
-            <a:endParaRPr lang="en-US"/>
           </a:p>
         </p:txBody>
       </p:sp>
@@ -1893,7 +1893,7 @@
           <a:p>
             <a:fld id="{5BCAD085-E8A6-8845-BD4E-CB4CCA059FC4}" type="datetimeFigureOut">
               <a:rPr lang="en-US" smtClean="0"/>
-              <a:t>1/27/13</a:t>
+              <a:t>15/10/26</a:t>
             </a:fld>
             <a:endParaRPr lang="en-US"/>
           </a:p>
@@ -1988,7 +1988,7 @@
           <a:p>
             <a:fld id="{5BCAD085-E8A6-8845-BD4E-CB4CCA059FC4}" type="datetimeFigureOut">
               <a:rPr lang="en-US" smtClean="0"/>
-              <a:t>1/27/13</a:t>
+              <a:t>15/10/26</a:t>
             </a:fld>
             <a:endParaRPr lang="en-US"/>
           </a:p>
@@ -2091,10 +2091,9 @@
           </a:lstStyle>
           <a:p>
             <a:r>
-              <a:rPr lang="en-US" smtClean="0"/>
+              <a:rPr lang="en-US"/>
               <a:t>Click to edit Master title style</a:t>
             </a:r>
-            <a:endParaRPr lang="en-US"/>
           </a:p>
         </p:txBody>
       </p:sp>
@@ -2148,38 +2147,37 @@
           <a:p>
             <a:pPr lvl="0"/>
             <a:r>
-              <a:rPr lang="en-US" smtClean="0"/>
+              <a:rPr lang="en-US"/>
               <a:t>Click to edit Master text styles</a:t>
             </a:r>
           </a:p>
           <a:p>
             <a:pPr lvl="1"/>
             <a:r>
-              <a:rPr lang="en-US" smtClean="0"/>
+              <a:rPr lang="en-US"/>
               <a:t>Second level</a:t>
             </a:r>
           </a:p>
           <a:p>
             <a:pPr lvl="2"/>
             <a:r>
-              <a:rPr lang="en-US" smtClean="0"/>
+              <a:rPr lang="en-US"/>
               <a:t>Third level</a:t>
             </a:r>
           </a:p>
           <a:p>
             <a:pPr lvl="3"/>
             <a:r>
-              <a:rPr lang="en-US" smtClean="0"/>
+              <a:rPr lang="en-US"/>
               <a:t>Fourth level</a:t>
             </a:r>
           </a:p>
           <a:p>
             <a:pPr lvl="4"/>
             <a:r>
-              <a:rPr lang="en-US" smtClean="0"/>
+              <a:rPr lang="en-US"/>
               <a:t>Fifth level</a:t>
             </a:r>
-            <a:endParaRPr lang="en-US"/>
           </a:p>
         </p:txBody>
       </p:sp>
@@ -2242,7 +2240,7 @@
           <a:p>
             <a:pPr lvl="0"/>
             <a:r>
-              <a:rPr lang="en-US" smtClean="0"/>
+              <a:rPr lang="en-US"/>
               <a:t>Click to edit Master text styles</a:t>
             </a:r>
           </a:p>
@@ -2265,7 +2263,7 @@
           <a:p>
             <a:fld id="{5BCAD085-E8A6-8845-BD4E-CB4CCA059FC4}" type="datetimeFigureOut">
               <a:rPr lang="en-US" smtClean="0"/>
-              <a:t>1/27/13</a:t>
+              <a:t>15/10/26</a:t>
             </a:fld>
             <a:endParaRPr lang="en-US"/>
           </a:p>
@@ -2368,10 +2366,9 @@
           </a:lstStyle>
           <a:p>
             <a:r>
-              <a:rPr lang="en-US" smtClean="0"/>
+              <a:rPr lang="en-US"/>
               <a:t>Click to edit Master title style</a:t>
             </a:r>
-            <a:endParaRPr lang="en-US"/>
           </a:p>
         </p:txBody>
       </p:sp>
@@ -2495,7 +2492,7 @@
           <a:p>
             <a:pPr lvl="0"/>
             <a:r>
-              <a:rPr lang="en-US" smtClean="0"/>
+              <a:rPr lang="en-US"/>
               <a:t>Click to edit Master text styles</a:t>
             </a:r>
           </a:p>
@@ -2518,7 +2515,7 @@
           <a:p>
             <a:fld id="{5BCAD085-E8A6-8845-BD4E-CB4CCA059FC4}" type="datetimeFigureOut">
               <a:rPr lang="en-US" smtClean="0"/>
-              <a:t>1/27/13</a:t>
+              <a:t>15/10/26</a:t>
             </a:fld>
             <a:endParaRPr lang="en-US"/>
           </a:p>
@@ -2627,10 +2624,9 @@
           <a:lstStyle/>
           <a:p>
             <a:r>
-              <a:rPr lang="en-US" smtClean="0"/>
+              <a:rPr lang="en-US"/>
               <a:t>Click to edit Master title style</a:t>
             </a:r>
-            <a:endParaRPr lang="en-US"/>
           </a:p>
         </p:txBody>
       </p:sp>
@@ -2661,38 +2657,37 @@
           <a:p>
             <a:pPr lvl="0"/>
             <a:r>
-              <a:rPr lang="en-US" smtClean="0"/>
+              <a:rPr lang="en-US"/>
               <a:t>Click to edit Master text styles</a:t>
             </a:r>
           </a:p>
           <a:p>
             <a:pPr lvl="1"/>
             <a:r>
-              <a:rPr lang="en-US" smtClean="0"/>
+              <a:rPr lang="en-US"/>
               <a:t>Second level</a:t>
             </a:r>
           </a:p>
           <a:p>
             <a:pPr lvl="2"/>
             <a:r>
-              <a:rPr lang="en-US" smtClean="0"/>
+              <a:rPr lang="en-US"/>
               <a:t>Third level</a:t>
             </a:r>
           </a:p>
           <a:p>
             <a:pPr lvl="3"/>
             <a:r>
-              <a:rPr lang="en-US" smtClean="0"/>
+              <a:rPr lang="en-US"/>
               <a:t>Fourth level</a:t>
             </a:r>
           </a:p>
           <a:p>
             <a:pPr lvl="4"/>
             <a:r>
-              <a:rPr lang="en-US" smtClean="0"/>
+              <a:rPr lang="en-US"/>
               <a:t>Fifth level</a:t>
             </a:r>
-            <a:endParaRPr lang="en-US"/>
           </a:p>
         </p:txBody>
       </p:sp>
@@ -2731,7 +2726,7 @@
           <a:p>
             <a:fld id="{5BCAD085-E8A6-8845-BD4E-CB4CCA059FC4}" type="datetimeFigureOut">
               <a:rPr lang="en-US" smtClean="0"/>
-              <a:t>1/27/13</a:t>
+              <a:t>15/10/26</a:t>
             </a:fld>
             <a:endParaRPr lang="en-US"/>
           </a:p>
@@ -3090,7 +3085,7 @@
 </file>
 
 <file path=ppt/slides/slide1.xml><?xml version="1.0" encoding="utf-8"?>
-<p:sld xmlns:a="http://schemas.openxmlformats.org/drawingml/2006/main" xmlns:p="http://schemas.openxmlformats.org/presentationml/2006/main" xmlns:r="http://schemas.openxmlformats.org/officeDocument/2006/relationships">
+<p:sld xmlns:a="http://schemas.openxmlformats.org/drawingml/2006/main" xmlns:r="http://schemas.openxmlformats.org/officeDocument/2006/relationships" xmlns:p="http://schemas.openxmlformats.org/presentationml/2006/main">
   <p:cSld>
     <p:spTree>
       <p:nvGrpSpPr>
@@ -3098,7 +3093,14 @@
         <p:cNvGrpSpPr/>
         <p:nvPr/>
       </p:nvGrpSpPr>
-      <p:grpSpPr/>
+      <p:grpSpPr>
+        <a:xfrm>
+          <a:off x="0" y="0"/>
+          <a:ext cx="0" cy="0"/>
+          <a:chOff x="0" y="0"/>
+          <a:chExt cx="0" cy="0"/>
+        </a:xfrm>
+      </p:grpSpPr>
       <p:sp>
         <p:nvSpPr>
           <p:cNvPr id="2" name="Rectangle 1"/>
@@ -3139,6 +3141,7 @@
           <a:lstStyle/>
           <a:p>
             <a:pPr algn="ctr"/>
+            <a:endParaRPr/>
           </a:p>
         </p:txBody>
       </p:sp>
@@ -3182,6 +3185,7 @@
           <a:lstStyle/>
           <a:p>
             <a:pPr algn="ctr"/>
+            <a:endParaRPr/>
           </a:p>
         </p:txBody>
       </p:sp>
@@ -3386,10 +3390,11 @@
           </a:fontRef>
         </p:style>
         <p:txBody>
-          <a:bodyPr rtlCol="0" anchor="ctr" wrap="square"/>
+          <a:bodyPr wrap="square" rtlCol="0" anchor="ctr"/>
           <a:lstStyle/>
           <a:p>
             <a:pPr algn="ctr"/>
+            <a:endParaRPr/>
           </a:p>
         </p:txBody>
       </p:sp>
@@ -3402,7 +3407,7 @@
         <p:spPr>
           <a:xfrm>
             <a:off x="1463040" y="4069080"/>
-            <a:ext cx="4663440" cy="502920"/>
+            <a:ext cx="1904689" cy="261610"/>
           </a:xfrm>
           <a:prstGeom prst="rect">
             <a:avLst/>
@@ -3424,16 +3429,18 @@
               </a:defRPr>
             </a:pPr>
             <a:r>
-              <a:t>Candidate / Team: </a:t>
-            </a:r>
-            <a:r>
-              <a:rPr b="0">
+              <a:rPr lang="en-US" b="1" dirty="0">
                 <a:solidFill>
                   <a:srgbClr val="94A3B8"/>
                 </a:solidFill>
               </a:rPr>
-              <a:t>[Student Name(s) / Candidate Placeholder]</a:t>
-            </a:r>
+              <a:t>Team Name : Task Tantra </a:t>
+            </a:r>
+            <a:endParaRPr b="1" dirty="0">
+              <a:solidFill>
+                <a:srgbClr val="94A3B8"/>
+              </a:solidFill>
+            </a:endParaRPr>
           </a:p>
         </p:txBody>
       </p:sp>
@@ -3445,8 +3452,8 @@
         </p:nvSpPr>
         <p:spPr>
           <a:xfrm>
-            <a:off x="6400800" y="4069080"/>
-            <a:ext cx="4663440" cy="502920"/>
+            <a:off x="6894233" y="4770922"/>
+            <a:ext cx="3804247" cy="261610"/>
           </a:xfrm>
           <a:prstGeom prst="rect">
             <a:avLst/>
@@ -3468,16 +3475,26 @@
               </a:defRPr>
             </a:pPr>
             <a:r>
-              <a:t>Enrollment Number: </a:t>
-            </a:r>
-            <a:r>
-              <a:rPr b="0">
+              <a:rPr lang="en-US" dirty="0"/>
+              <a:t>Team Members</a:t>
+            </a:r>
+            <a:r>
+              <a:rPr dirty="0"/>
+              <a:t>: </a:t>
+            </a:r>
+            <a:r>
+              <a:rPr lang="en-US" dirty="0">
                 <a:solidFill>
                   <a:srgbClr val="94A3B8"/>
                 </a:solidFill>
               </a:rPr>
-              <a:t>[Enrollment Number / Roll ID Placeholder]</a:t>
-            </a:r>
+              <a:t>Krish Raj, Ananya Tiwari, Kajal Kumari</a:t>
+            </a:r>
+            <a:endParaRPr b="0" dirty="0">
+              <a:solidFill>
+                <a:srgbClr val="94A3B8"/>
+              </a:solidFill>
+            </a:endParaRPr>
           </a:p>
         </p:txBody>
       </p:sp>
@@ -3490,7 +3507,7 @@
         <p:spPr>
           <a:xfrm>
             <a:off x="1463040" y="4663440"/>
-            <a:ext cx="4663440" cy="502920"/>
+            <a:ext cx="2358338" cy="261610"/>
           </a:xfrm>
           <a:prstGeom prst="rect">
             <a:avLst/>
@@ -3512,29 +3529,43 @@
               </a:defRPr>
             </a:pPr>
             <a:r>
+              <a:rPr dirty="0"/>
               <a:t>Department &amp; Degree: </a:t>
             </a:r>
             <a:r>
-              <a:rPr b="0">
+              <a:rPr lang="en-US" b="0" dirty="0" err="1">
                 <a:solidFill>
                   <a:srgbClr val="FFFFFF"/>
                 </a:solidFill>
               </a:rPr>
-              <a:t>Department of Computer Science &amp; Engineering — B.Tech / BE</a:t>
-            </a:r>
-          </a:p>
-        </p:txBody>
-      </p:sp>
-      <p:sp>
-        <p:nvSpPr>
-          <p:cNvPr id="12" name="TextBox 11"/>
+              <a:t>Btech</a:t>
+            </a:r>
+            <a:r>
+              <a:rPr lang="en-US" b="0" dirty="0">
+                <a:solidFill>
+                  <a:srgbClr val="FFFFFF"/>
+                </a:solidFill>
+              </a:rPr>
+              <a:t> CSE</a:t>
+            </a:r>
+            <a:endParaRPr b="0" dirty="0">
+              <a:solidFill>
+                <a:srgbClr val="FFFFFF"/>
+              </a:solidFill>
+            </a:endParaRPr>
+          </a:p>
+        </p:txBody>
+      </p:sp>
+      <p:sp>
+        <p:nvSpPr>
+          <p:cNvPr id="13" name="TextBox 12"/>
           <p:cNvSpPr txBox="1"/>
           <p:nvPr/>
         </p:nvSpPr>
         <p:spPr>
           <a:xfrm>
-            <a:off x="6400800" y="4663440"/>
-            <a:ext cx="4663440" cy="502920"/>
+            <a:off x="1472467" y="5199370"/>
+            <a:ext cx="2385589" cy="261610"/>
           </a:xfrm>
           <a:prstGeom prst="rect">
             <a:avLst/>
@@ -3556,29 +3587,43 @@
               </a:defRPr>
             </a:pPr>
             <a:r>
-              <a:t>Faculty Guide: </a:t>
-            </a:r>
-            <a:r>
-              <a:rPr b="0">
+              <a:rPr dirty="0"/>
+              <a:t>Institution : </a:t>
+            </a:r>
+            <a:r>
+              <a:rPr lang="en-US" dirty="0" err="1">
                 <a:solidFill>
                   <a:srgbClr val="94A3B8"/>
                 </a:solidFill>
               </a:rPr>
-              <a:t>[Faculty Supervisor / Project Guide Placeholder]</a:t>
-            </a:r>
-          </a:p>
-        </p:txBody>
-      </p:sp>
-      <p:sp>
-        <p:nvSpPr>
-          <p:cNvPr id="13" name="TextBox 12"/>
+              <a:t>Galgotias</a:t>
+            </a:r>
+            <a:r>
+              <a:rPr lang="en-US" dirty="0">
+                <a:solidFill>
+                  <a:srgbClr val="94A3B8"/>
+                </a:solidFill>
+              </a:rPr>
+              <a:t> University</a:t>
+            </a:r>
+            <a:endParaRPr b="0" dirty="0">
+              <a:solidFill>
+                <a:srgbClr val="94A3B8"/>
+              </a:solidFill>
+            </a:endParaRPr>
+          </a:p>
+        </p:txBody>
+      </p:sp>
+      <p:sp>
+        <p:nvSpPr>
+          <p:cNvPr id="14" name="TextBox 13"/>
           <p:cNvSpPr txBox="1"/>
           <p:nvPr/>
         </p:nvSpPr>
         <p:spPr>
           <a:xfrm>
-            <a:off x="1463040" y="5257800"/>
-            <a:ext cx="4663440" cy="502920"/>
+            <a:off x="1463040" y="5669280"/>
+            <a:ext cx="7217040" cy="261610"/>
           </a:xfrm>
           <a:prstGeom prst="rect">
             <a:avLst/>
@@ -3600,59 +3645,16 @@
               </a:defRPr>
             </a:pPr>
             <a:r>
-              <a:t>Institution / University: </a:t>
-            </a:r>
-            <a:r>
-              <a:rPr b="0">
-                <a:solidFill>
-                  <a:srgbClr val="94A3B8"/>
+              <a:rPr dirty="0"/>
+              <a:t>Evaluation Framework: </a:t>
+            </a:r>
+            <a:r>
+              <a:rPr b="0" dirty="0">
+                <a:solidFill>
+                  <a:srgbClr val="FFFFFF"/>
                 </a:solidFill>
               </a:rPr>
-              <a:t>[University / College Name Placeholder]</a:t>
-            </a:r>
-          </a:p>
-        </p:txBody>
-      </p:sp>
-      <p:sp>
-        <p:nvSpPr>
-          <p:cNvPr id="14" name="TextBox 13"/>
-          <p:cNvSpPr txBox="1"/>
-          <p:nvPr/>
-        </p:nvSpPr>
-        <p:spPr>
-          <a:xfrm>
-            <a:off x="6400800" y="5257800"/>
-            <a:ext cx="4663440" cy="502920"/>
-          </a:xfrm>
-          <a:prstGeom prst="rect">
-            <a:avLst/>
-          </a:prstGeom>
-          <a:noFill/>
-        </p:spPr>
-        <p:txBody>
-          <a:bodyPr wrap="none">
-            <a:spAutoFit/>
-          </a:bodyPr>
-          <a:lstStyle/>
-          <a:p>
-            <a:pPr>
-              <a:defRPr sz="1100" b="1">
-                <a:solidFill>
-                  <a:srgbClr val="CBD5E1"/>
-                </a:solidFill>
-                <a:latin typeface="Segoe UI"/>
-              </a:defRPr>
-            </a:pPr>
-            <a:r>
-              <a:t>Evaluation Framework: </a:t>
-            </a:r>
-            <a:r>
-              <a:rPr b="0">
-                <a:solidFill>
-                  <a:srgbClr val="FFFFFF"/>
-                </a:solidFill>
-              </a:rPr>
-              <a:t>Java Web Project Rubric: Problem Design (8) + Core Java (10) + JDBC (8) + Servlets (7) = 33/33</a:t>
+              <a:t>Java Web Project Rubric: Problem Design (8) + Core Java (10) + JDBC (8) + Servlets (7) </a:t>
             </a:r>
           </a:p>
         </p:txBody>
@@ -3666,7 +3668,7 @@
 </file>
 
 <file path=ppt/slides/slide10.xml><?xml version="1.0" encoding="utf-8"?>
-<p:sld xmlns:a="http://schemas.openxmlformats.org/drawingml/2006/main" xmlns:p="http://schemas.openxmlformats.org/presentationml/2006/main" xmlns:r="http://schemas.openxmlformats.org/officeDocument/2006/relationships">
+<p:sld xmlns:a="http://schemas.openxmlformats.org/drawingml/2006/main" xmlns:r="http://schemas.openxmlformats.org/officeDocument/2006/relationships" xmlns:p="http://schemas.openxmlformats.org/presentationml/2006/main">
   <p:cSld>
     <p:spTree>
       <p:nvGrpSpPr>
@@ -3674,7 +3676,14 @@
         <p:cNvGrpSpPr/>
         <p:nvPr/>
       </p:nvGrpSpPr>
-      <p:grpSpPr/>
+      <p:grpSpPr>
+        <a:xfrm>
+          <a:off x="0" y="0"/>
+          <a:ext cx="0" cy="0"/>
+          <a:chOff x="0" y="0"/>
+          <a:chExt cx="0" cy="0"/>
+        </a:xfrm>
+      </p:grpSpPr>
       <p:sp>
         <p:nvSpPr>
           <p:cNvPr id="2" name="Rectangle 1"/>
@@ -3715,6 +3724,7 @@
           <a:lstStyle/>
           <a:p>
             <a:pPr algn="ctr"/>
+            <a:endParaRPr/>
           </a:p>
         </p:txBody>
       </p:sp>
@@ -3727,7 +3737,7 @@
         <p:spPr>
           <a:xfrm>
             <a:off x="731520" y="365760"/>
-            <a:ext cx="10698480" cy="274320"/>
+            <a:ext cx="10698480" cy="246221"/>
           </a:xfrm>
           <a:prstGeom prst="rect">
             <a:avLst/>
@@ -3749,7 +3759,8 @@
               </a:defRPr>
             </a:pPr>
             <a:r>
-              <a:t>SLIDE 10 / RUBRIC EVALUATION SCORECARD (33 / 33 MARKS)</a:t>
+              <a:rPr dirty="0"/>
+              <a:t>SLIDE 10 / RUBRIC EVALUATION</a:t>
             </a:r>
           </a:p>
         </p:txBody>
@@ -3830,6 +3841,7 @@
           <a:lstStyle/>
           <a:p>
             <a:pPr algn="ctr"/>
+            <a:endParaRPr/>
           </a:p>
         </p:txBody>
       </p:sp>
@@ -3875,7 +3887,13 @@
           <p:cNvGraphicFramePr>
             <a:graphicFrameLocks noGrp="1"/>
           </p:cNvGraphicFramePr>
-          <p:nvPr/>
+          <p:nvPr>
+            <p:extLst>
+              <p:ext uri="{D42A27DB-BD31-4B8C-83A1-F6EECF244321}">
+                <p14:modId xmlns:p14="http://schemas.microsoft.com/office/powerpoint/2010/main" val="1785631799"/>
+              </p:ext>
+            </p:extLst>
+          </p:nvPr>
         </p:nvGraphicFramePr>
         <p:xfrm>
           <a:off x="731520" y="1280160"/>
@@ -3888,10 +3906,34 @@
                 <a:tableStyleId>{5C22544A-7EE6-4342-B048-85BDC9FD1C3A}</a:tableStyleId>
               </a:tblPr>
               <a:tblGrid>
-                <a:gridCol w="2011680"/>
-                <a:gridCol w="1188720"/>
-                <a:gridCol w="5486400"/>
-                <a:gridCol w="2041855"/>
+                <a:gridCol w="2011680">
+                  <a:extLst>
+                    <a:ext uri="{9D8B030D-6E8A-4147-A177-3AD203B41FA5}">
+                      <a16:colId xmlns:a16="http://schemas.microsoft.com/office/drawing/2014/main" val="20000"/>
+                    </a:ext>
+                  </a:extLst>
+                </a:gridCol>
+                <a:gridCol w="1188720">
+                  <a:extLst>
+                    <a:ext uri="{9D8B030D-6E8A-4147-A177-3AD203B41FA5}">
+                      <a16:colId xmlns:a16="http://schemas.microsoft.com/office/drawing/2014/main" val="20001"/>
+                    </a:ext>
+                  </a:extLst>
+                </a:gridCol>
+                <a:gridCol w="5486400">
+                  <a:extLst>
+                    <a:ext uri="{9D8B030D-6E8A-4147-A177-3AD203B41FA5}">
+                      <a16:colId xmlns:a16="http://schemas.microsoft.com/office/drawing/2014/main" val="20002"/>
+                    </a:ext>
+                  </a:extLst>
+                </a:gridCol>
+                <a:gridCol w="2041855">
+                  <a:extLst>
+                    <a:ext uri="{9D8B030D-6E8A-4147-A177-3AD203B41FA5}">
+                      <a16:colId xmlns:a16="http://schemas.microsoft.com/office/drawing/2014/main" val="20003"/>
+                    </a:ext>
+                  </a:extLst>
+                </a:gridCol>
               </a:tblGrid>
               <a:tr h="969264">
                 <a:tc>
@@ -3900,7 +3942,7 @@
                     <a:lstStyle/>
                     <a:p>
                       <a:pPr>
-                        <a:defRPr b="1" sz="1100">
+                        <a:defRPr sz="1100" b="1">
                           <a:solidFill>
                             <a:srgbClr val="FFFFFF"/>
                           </a:solidFill>
@@ -3924,7 +3966,7 @@
                     <a:lstStyle/>
                     <a:p>
                       <a:pPr>
-                        <a:defRPr b="1" sz="1100">
+                        <a:defRPr sz="1100" b="1">
                           <a:solidFill>
                             <a:srgbClr val="FFFFFF"/>
                           </a:solidFill>
@@ -3948,7 +3990,7 @@
                     <a:lstStyle/>
                     <a:p>
                       <a:pPr>
-                        <a:defRPr b="1" sz="1100">
+                        <a:defRPr sz="1100" b="1">
                           <a:solidFill>
                             <a:srgbClr val="FFFFFF"/>
                           </a:solidFill>
@@ -3956,6 +3998,7 @@
                         </a:defRPr>
                       </a:pPr>
                       <a:r>
+                        <a:rPr dirty="0"/>
                         <a:t>Implemented Code &amp; Artifacts</a:t>
                       </a:r>
                     </a:p>
@@ -3972,16 +4015,14 @@
                     <a:lstStyle/>
                     <a:p>
                       <a:pPr>
-                        <a:defRPr b="1" sz="1100">
+                        <a:defRPr sz="1100" b="1">
                           <a:solidFill>
                             <a:srgbClr val="FFFFFF"/>
                           </a:solidFill>
                           <a:latin typeface="Segoe UI"/>
                         </a:defRPr>
                       </a:pPr>
-                      <a:r>
-                        <a:t>Status &amp; Verification</a:t>
-                      </a:r>
+                      <a:endParaRPr dirty="0"/>
                     </a:p>
                   </a:txBody>
                   <a:tcPr>
@@ -3990,6 +4031,11 @@
                     </a:solidFill>
                   </a:tcPr>
                 </a:tc>
+                <a:extLst>
+                  <a:ext uri="{0D108BD9-81ED-4DB2-BD59-A6C34878D82A}">
+                    <a16:rowId xmlns:a16="http://schemas.microsoft.com/office/drawing/2014/main" val="10000"/>
+                  </a:ext>
+                </a:extLst>
               </a:tr>
               <a:tr h="969264">
                 <a:tc>
@@ -4030,6 +4076,7 @@
                         </a:defRPr>
                       </a:pPr>
                       <a:r>
+                        <a:rPr dirty="0"/>
                         <a:t>8 / 8 Marks</a:t>
                       </a:r>
                     </a:p>
@@ -4077,14 +4124,7 @@
                           <a:latin typeface="Segoe UI"/>
                         </a:defRPr>
                       </a:pPr>
-                      <a:r>
-                        <a:t>✔ 100% Complete</a:t>
-                      </a:r>
-                    </a:p>
-                    <a:p>
-                      <a:r>
-                        <a:t>Verified via End-to-End Suite</a:t>
-                      </a:r>
+                      <a:endParaRPr dirty="0"/>
                     </a:p>
                   </a:txBody>
                   <a:tcPr>
@@ -4093,6 +4133,11 @@
                     </a:solidFill>
                   </a:tcPr>
                 </a:tc>
+                <a:extLst>
+                  <a:ext uri="{0D108BD9-81ED-4DB2-BD59-A6C34878D82A}">
+                    <a16:rowId xmlns:a16="http://schemas.microsoft.com/office/drawing/2014/main" val="10001"/>
+                  </a:ext>
+                </a:extLst>
               </a:tr>
               <a:tr h="969264">
                 <a:tc>
@@ -4180,14 +4225,7 @@
                           <a:latin typeface="Segoe UI"/>
                         </a:defRPr>
                       </a:pPr>
-                      <a:r>
-                        <a:t>✔ 100% Complete</a:t>
-                      </a:r>
-                    </a:p>
-                    <a:p>
-                      <a:r>
-                        <a:t>43 Source Files Compiled</a:t>
-                      </a:r>
+                      <a:endParaRPr dirty="0"/>
                     </a:p>
                   </a:txBody>
                   <a:tcPr>
@@ -4196,6 +4234,11 @@
                     </a:solidFill>
                   </a:tcPr>
                 </a:tc>
+                <a:extLst>
+                  <a:ext uri="{0D108BD9-81ED-4DB2-BD59-A6C34878D82A}">
+                    <a16:rowId xmlns:a16="http://schemas.microsoft.com/office/drawing/2014/main" val="10002"/>
+                  </a:ext>
+                </a:extLst>
               </a:tr>
               <a:tr h="969264">
                 <a:tc>
@@ -4283,14 +4326,7 @@
                           <a:latin typeface="Segoe UI"/>
                         </a:defRPr>
                       </a:pPr>
-                      <a:r>
-                        <a:t>✔ 100% Complete</a:t>
-                      </a:r>
-                    </a:p>
-                    <a:p>
-                      <a:r>
-                        <a:t>Verified CRUD Operations</a:t>
-                      </a:r>
+                      <a:endParaRPr dirty="0"/>
                     </a:p>
                   </a:txBody>
                   <a:tcPr>
@@ -4299,6 +4335,11 @@
                     </a:solidFill>
                   </a:tcPr>
                 </a:tc>
+                <a:extLst>
+                  <a:ext uri="{0D108BD9-81ED-4DB2-BD59-A6C34878D82A}">
+                    <a16:rowId xmlns:a16="http://schemas.microsoft.com/office/drawing/2014/main" val="10003"/>
+                  </a:ext>
+                </a:extLst>
               </a:tr>
               <a:tr h="969264">
                 <a:tc>
@@ -4386,14 +4427,7 @@
                           <a:latin typeface="Segoe UI"/>
                         </a:defRPr>
                       </a:pPr>
-                      <a:r>
-                        <a:t>✔ 100% Complete</a:t>
-                      </a:r>
-                    </a:p>
-                    <a:p>
-                      <a:r>
-                        <a:t>Jetty 11 Runtime Verified</a:t>
-                      </a:r>
+                      <a:endParaRPr dirty="0"/>
                     </a:p>
                   </a:txBody>
                   <a:tcPr>
@@ -4402,6 +4436,11 @@
                     </a:solidFill>
                   </a:tcPr>
                 </a:tc>
+                <a:extLst>
+                  <a:ext uri="{0D108BD9-81ED-4DB2-BD59-A6C34878D82A}">
+                    <a16:rowId xmlns:a16="http://schemas.microsoft.com/office/drawing/2014/main" val="10004"/>
+                  </a:ext>
+                </a:extLst>
               </a:tr>
             </a:tbl>
           </a:graphicData>
@@ -4416,7 +4455,7 @@
 </file>
 
 <file path=ppt/slides/slide11.xml><?xml version="1.0" encoding="utf-8"?>
-<p:sld xmlns:a="http://schemas.openxmlformats.org/drawingml/2006/main" xmlns:p="http://schemas.openxmlformats.org/presentationml/2006/main" xmlns:r="http://schemas.openxmlformats.org/officeDocument/2006/relationships">
+<p:sld xmlns:a="http://schemas.openxmlformats.org/drawingml/2006/main" xmlns:r="http://schemas.openxmlformats.org/officeDocument/2006/relationships" xmlns:p="http://schemas.openxmlformats.org/presentationml/2006/main">
   <p:cSld>
     <p:spTree>
       <p:nvGrpSpPr>
@@ -4424,7 +4463,14 @@
         <p:cNvGrpSpPr/>
         <p:nvPr/>
       </p:nvGrpSpPr>
-      <p:grpSpPr/>
+      <p:grpSpPr>
+        <a:xfrm>
+          <a:off x="0" y="0"/>
+          <a:ext cx="0" cy="0"/>
+          <a:chOff x="0" y="0"/>
+          <a:chExt cx="0" cy="0"/>
+        </a:xfrm>
+      </p:grpSpPr>
       <p:sp>
         <p:nvSpPr>
           <p:cNvPr id="2" name="Rectangle 1"/>
@@ -4465,6 +4511,7 @@
           <a:lstStyle/>
           <a:p>
             <a:pPr algn="ctr"/>
+            <a:endParaRPr/>
           </a:p>
         </p:txBody>
       </p:sp>
@@ -4580,6 +4627,7 @@
           <a:lstStyle/>
           <a:p>
             <a:pPr algn="ctr"/>
+            <a:endParaRPr/>
           </a:p>
         </p:txBody>
       </p:sp>
@@ -4661,6 +4709,7 @@
           <a:lstStyle/>
           <a:p>
             <a:pPr algn="ctr"/>
+            <a:endParaRPr/>
           </a:p>
         </p:txBody>
       </p:sp>
@@ -4825,6 +4874,7 @@
           <a:lstStyle/>
           <a:p>
             <a:pPr algn="ctr"/>
+            <a:endParaRPr/>
           </a:p>
         </p:txBody>
       </p:sp>
@@ -4956,7 +5006,7 @@
 </file>
 
 <file path=ppt/slides/slide12.xml><?xml version="1.0" encoding="utf-8"?>
-<p:sld xmlns:a="http://schemas.openxmlformats.org/drawingml/2006/main" xmlns:p="http://schemas.openxmlformats.org/presentationml/2006/main" xmlns:r="http://schemas.openxmlformats.org/officeDocument/2006/relationships">
+<p:sld xmlns:a="http://schemas.openxmlformats.org/drawingml/2006/main" xmlns:r="http://schemas.openxmlformats.org/officeDocument/2006/relationships" xmlns:p="http://schemas.openxmlformats.org/presentationml/2006/main">
   <p:cSld>
     <p:spTree>
       <p:nvGrpSpPr>
@@ -4964,7 +5014,14 @@
         <p:cNvGrpSpPr/>
         <p:nvPr/>
       </p:nvGrpSpPr>
-      <p:grpSpPr/>
+      <p:grpSpPr>
+        <a:xfrm>
+          <a:off x="0" y="0"/>
+          <a:ext cx="0" cy="0"/>
+          <a:chOff x="0" y="0"/>
+          <a:chExt cx="0" cy="0"/>
+        </a:xfrm>
+      </p:grpSpPr>
       <p:sp>
         <p:nvSpPr>
           <p:cNvPr id="2" name="Rectangle 1"/>
@@ -5005,6 +5062,7 @@
           <a:lstStyle/>
           <a:p>
             <a:pPr algn="ctr"/>
+            <a:endParaRPr/>
           </a:p>
         </p:txBody>
       </p:sp>
@@ -5048,6 +5106,7 @@
           <a:lstStyle/>
           <a:p>
             <a:pPr algn="ctr"/>
+            <a:endParaRPr/>
           </a:p>
         </p:txBody>
       </p:sp>
@@ -5093,6 +5152,7 @@
           <a:lstStyle/>
           <a:p>
             <a:pPr algn="ctr"/>
+            <a:endParaRPr/>
           </a:p>
         </p:txBody>
       </p:sp>
@@ -5225,6 +5285,7 @@
           <a:lstStyle/>
           <a:p>
             <a:pPr algn="ctr"/>
+            <a:endParaRPr/>
           </a:p>
         </p:txBody>
       </p:sp>
@@ -5284,7 +5345,7 @@
 </file>
 
 <file path=ppt/slides/slide2.xml><?xml version="1.0" encoding="utf-8"?>
-<p:sld xmlns:a="http://schemas.openxmlformats.org/drawingml/2006/main" xmlns:p="http://schemas.openxmlformats.org/presentationml/2006/main" xmlns:r="http://schemas.openxmlformats.org/officeDocument/2006/relationships">
+<p:sld xmlns:a="http://schemas.openxmlformats.org/drawingml/2006/main" xmlns:r="http://schemas.openxmlformats.org/officeDocument/2006/relationships" xmlns:p="http://schemas.openxmlformats.org/presentationml/2006/main">
   <p:cSld>
     <p:spTree>
       <p:nvGrpSpPr>
@@ -5292,7 +5353,14 @@
         <p:cNvGrpSpPr/>
         <p:nvPr/>
       </p:nvGrpSpPr>
-      <p:grpSpPr/>
+      <p:grpSpPr>
+        <a:xfrm>
+          <a:off x="0" y="0"/>
+          <a:ext cx="0" cy="0"/>
+          <a:chOff x="0" y="0"/>
+          <a:chExt cx="0" cy="0"/>
+        </a:xfrm>
+      </p:grpSpPr>
       <p:sp>
         <p:nvSpPr>
           <p:cNvPr id="2" name="Rectangle 1"/>
@@ -5333,6 +5401,7 @@
           <a:lstStyle/>
           <a:p>
             <a:pPr algn="ctr"/>
+            <a:endParaRPr/>
           </a:p>
         </p:txBody>
       </p:sp>
@@ -5448,6 +5517,7 @@
           <a:lstStyle/>
           <a:p>
             <a:pPr algn="ctr"/>
+            <a:endParaRPr/>
           </a:p>
         </p:txBody>
       </p:sp>
@@ -5529,6 +5599,7 @@
           <a:lstStyle/>
           <a:p>
             <a:pPr algn="ctr"/>
+            <a:endParaRPr/>
           </a:p>
         </p:txBody>
       </p:sp>
@@ -5662,6 +5733,7 @@
           <a:lstStyle/>
           <a:p>
             <a:pPr algn="ctr"/>
+            <a:endParaRPr/>
           </a:p>
         </p:txBody>
       </p:sp>
@@ -5795,6 +5867,7 @@
           <a:lstStyle/>
           <a:p>
             <a:pPr algn="ctr"/>
+            <a:endParaRPr/>
           </a:p>
         </p:txBody>
       </p:sp>
@@ -5895,7 +5968,7 @@
 </file>
 
 <file path=ppt/slides/slide3.xml><?xml version="1.0" encoding="utf-8"?>
-<p:sld xmlns:a="http://schemas.openxmlformats.org/drawingml/2006/main" xmlns:p="http://schemas.openxmlformats.org/presentationml/2006/main" xmlns:r="http://schemas.openxmlformats.org/officeDocument/2006/relationships">
+<p:sld xmlns:a="http://schemas.openxmlformats.org/drawingml/2006/main" xmlns:r="http://schemas.openxmlformats.org/officeDocument/2006/relationships" xmlns:p="http://schemas.openxmlformats.org/presentationml/2006/main">
   <p:cSld>
     <p:spTree>
       <p:nvGrpSpPr>
@@ -5903,7 +5976,14 @@
         <p:cNvGrpSpPr/>
         <p:nvPr/>
       </p:nvGrpSpPr>
-      <p:grpSpPr/>
+      <p:grpSpPr>
+        <a:xfrm>
+          <a:off x="0" y="0"/>
+          <a:ext cx="0" cy="0"/>
+          <a:chOff x="0" y="0"/>
+          <a:chExt cx="0" cy="0"/>
+        </a:xfrm>
+      </p:grpSpPr>
       <p:sp>
         <p:nvSpPr>
           <p:cNvPr id="2" name="Rectangle 1"/>
@@ -5944,6 +6024,7 @@
           <a:lstStyle/>
           <a:p>
             <a:pPr algn="ctr"/>
+            <a:endParaRPr/>
           </a:p>
         </p:txBody>
       </p:sp>
@@ -6059,6 +6140,7 @@
           <a:lstStyle/>
           <a:p>
             <a:pPr algn="ctr"/>
+            <a:endParaRPr/>
           </a:p>
         </p:txBody>
       </p:sp>
@@ -6140,6 +6222,7 @@
           <a:lstStyle/>
           <a:p>
             <a:pPr algn="ctr"/>
+            <a:endParaRPr/>
           </a:p>
         </p:txBody>
       </p:sp>
@@ -6232,6 +6315,7 @@
           <a:lstStyle/>
           <a:p>
             <a:pPr algn="ctr"/>
+            <a:endParaRPr/>
           </a:p>
         </p:txBody>
       </p:sp>
@@ -6326,6 +6410,7 @@
           <a:lstStyle/>
           <a:p>
             <a:pPr algn="ctr"/>
+            <a:endParaRPr/>
           </a:p>
         </p:txBody>
       </p:sp>
@@ -6420,6 +6505,7 @@
           <a:lstStyle/>
           <a:p>
             <a:pPr algn="ctr"/>
+            <a:endParaRPr/>
           </a:p>
         </p:txBody>
       </p:sp>
@@ -6514,6 +6600,7 @@
           <a:lstStyle/>
           <a:p>
             <a:pPr algn="ctr"/>
+            <a:endParaRPr/>
           </a:p>
         </p:txBody>
       </p:sp>
@@ -6575,7 +6662,7 @@
 </file>
 
 <file path=ppt/slides/slide4.xml><?xml version="1.0" encoding="utf-8"?>
-<p:sld xmlns:a="http://schemas.openxmlformats.org/drawingml/2006/main" xmlns:p="http://schemas.openxmlformats.org/presentationml/2006/main" xmlns:r="http://schemas.openxmlformats.org/officeDocument/2006/relationships">
+<p:sld xmlns:a="http://schemas.openxmlformats.org/drawingml/2006/main" xmlns:r="http://schemas.openxmlformats.org/officeDocument/2006/relationships" xmlns:p="http://schemas.openxmlformats.org/presentationml/2006/main">
   <p:cSld>
     <p:spTree>
       <p:nvGrpSpPr>
@@ -6583,7 +6670,14 @@
         <p:cNvGrpSpPr/>
         <p:nvPr/>
       </p:nvGrpSpPr>
-      <p:grpSpPr/>
+      <p:grpSpPr>
+        <a:xfrm>
+          <a:off x="0" y="0"/>
+          <a:ext cx="0" cy="0"/>
+          <a:chOff x="0" y="0"/>
+          <a:chExt cx="0" cy="0"/>
+        </a:xfrm>
+      </p:grpSpPr>
       <p:sp>
         <p:nvSpPr>
           <p:cNvPr id="2" name="Rectangle 1"/>
@@ -6624,6 +6718,7 @@
           <a:lstStyle/>
           <a:p>
             <a:pPr algn="ctr"/>
+            <a:endParaRPr/>
           </a:p>
         </p:txBody>
       </p:sp>
@@ -6739,6 +6834,7 @@
           <a:lstStyle/>
           <a:p>
             <a:pPr algn="ctr"/>
+            <a:endParaRPr/>
           </a:p>
         </p:txBody>
       </p:sp>
@@ -6820,6 +6916,7 @@
           <a:lstStyle/>
           <a:p>
             <a:pPr algn="ctr"/>
+            <a:endParaRPr/>
           </a:p>
         </p:txBody>
       </p:sp>
@@ -7147,6 +7244,7 @@
           <a:lstStyle/>
           <a:p>
             <a:pPr algn="ctr"/>
+            <a:endParaRPr/>
           </a:p>
         </p:txBody>
       </p:sp>
@@ -7404,7 +7502,7 @@
 </file>
 
 <file path=ppt/slides/slide5.xml><?xml version="1.0" encoding="utf-8"?>
-<p:sld xmlns:a="http://schemas.openxmlformats.org/drawingml/2006/main" xmlns:p="http://schemas.openxmlformats.org/presentationml/2006/main" xmlns:r="http://schemas.openxmlformats.org/officeDocument/2006/relationships">
+<p:sld xmlns:a="http://schemas.openxmlformats.org/drawingml/2006/main" xmlns:r="http://schemas.openxmlformats.org/officeDocument/2006/relationships" xmlns:p="http://schemas.openxmlformats.org/presentationml/2006/main">
   <p:cSld>
     <p:spTree>
       <p:nvGrpSpPr>
@@ -7412,7 +7510,14 @@
         <p:cNvGrpSpPr/>
         <p:nvPr/>
       </p:nvGrpSpPr>
-      <p:grpSpPr/>
+      <p:grpSpPr>
+        <a:xfrm>
+          <a:off x="0" y="0"/>
+          <a:ext cx="0" cy="0"/>
+          <a:chOff x="0" y="0"/>
+          <a:chExt cx="0" cy="0"/>
+        </a:xfrm>
+      </p:grpSpPr>
       <p:sp>
         <p:nvSpPr>
           <p:cNvPr id="2" name="Rectangle 1"/>
@@ -7453,6 +7558,7 @@
           <a:lstStyle/>
           <a:p>
             <a:pPr algn="ctr"/>
+            <a:endParaRPr/>
           </a:p>
         </p:txBody>
       </p:sp>
@@ -7568,6 +7674,7 @@
           <a:lstStyle/>
           <a:p>
             <a:pPr algn="ctr"/>
+            <a:endParaRPr/>
           </a:p>
         </p:txBody>
       </p:sp>
@@ -7673,6 +7780,7 @@
           <a:lstStyle/>
           <a:p>
             <a:pPr algn="ctr"/>
+            <a:endParaRPr/>
           </a:p>
         </p:txBody>
       </p:sp>
@@ -7811,7 +7919,7 @@
 </file>
 
 <file path=ppt/slides/slide6.xml><?xml version="1.0" encoding="utf-8"?>
-<p:sld xmlns:a="http://schemas.openxmlformats.org/drawingml/2006/main" xmlns:p="http://schemas.openxmlformats.org/presentationml/2006/main" xmlns:r="http://schemas.openxmlformats.org/officeDocument/2006/relationships">
+<p:sld xmlns:a="http://schemas.openxmlformats.org/drawingml/2006/main" xmlns:r="http://schemas.openxmlformats.org/officeDocument/2006/relationships" xmlns:p="http://schemas.openxmlformats.org/presentationml/2006/main">
   <p:cSld>
     <p:spTree>
       <p:nvGrpSpPr>
@@ -7819,7 +7927,14 @@
         <p:cNvGrpSpPr/>
         <p:nvPr/>
       </p:nvGrpSpPr>
-      <p:grpSpPr/>
+      <p:grpSpPr>
+        <a:xfrm>
+          <a:off x="0" y="0"/>
+          <a:ext cx="0" cy="0"/>
+          <a:chOff x="0" y="0"/>
+          <a:chExt cx="0" cy="0"/>
+        </a:xfrm>
+      </p:grpSpPr>
       <p:sp>
         <p:nvSpPr>
           <p:cNvPr id="2" name="Rectangle 1"/>
@@ -7860,6 +7975,7 @@
           <a:lstStyle/>
           <a:p>
             <a:pPr algn="ctr"/>
+            <a:endParaRPr/>
           </a:p>
         </p:txBody>
       </p:sp>
@@ -7975,6 +8091,7 @@
           <a:lstStyle/>
           <a:p>
             <a:pPr algn="ctr"/>
+            <a:endParaRPr/>
           </a:p>
         </p:txBody>
       </p:sp>
@@ -8080,6 +8197,7 @@
           <a:lstStyle/>
           <a:p>
             <a:pPr algn="ctr"/>
+            <a:endParaRPr/>
           </a:p>
         </p:txBody>
       </p:sp>
@@ -8218,7 +8336,7 @@
 </file>
 
 <file path=ppt/slides/slide7.xml><?xml version="1.0" encoding="utf-8"?>
-<p:sld xmlns:a="http://schemas.openxmlformats.org/drawingml/2006/main" xmlns:p="http://schemas.openxmlformats.org/presentationml/2006/main" xmlns:r="http://schemas.openxmlformats.org/officeDocument/2006/relationships">
+<p:sld xmlns:a="http://schemas.openxmlformats.org/drawingml/2006/main" xmlns:r="http://schemas.openxmlformats.org/officeDocument/2006/relationships" xmlns:p="http://schemas.openxmlformats.org/presentationml/2006/main">
   <p:cSld>
     <p:spTree>
       <p:nvGrpSpPr>
@@ -8226,7 +8344,14 @@
         <p:cNvGrpSpPr/>
         <p:nvPr/>
       </p:nvGrpSpPr>
-      <p:grpSpPr/>
+      <p:grpSpPr>
+        <a:xfrm>
+          <a:off x="0" y="0"/>
+          <a:ext cx="0" cy="0"/>
+          <a:chOff x="0" y="0"/>
+          <a:chExt cx="0" cy="0"/>
+        </a:xfrm>
+      </p:grpSpPr>
       <p:sp>
         <p:nvSpPr>
           <p:cNvPr id="2" name="Rectangle 1"/>
@@ -8267,6 +8392,7 @@
           <a:lstStyle/>
           <a:p>
             <a:pPr algn="ctr"/>
+            <a:endParaRPr/>
           </a:p>
         </p:txBody>
       </p:sp>
@@ -8382,6 +8508,7 @@
           <a:lstStyle/>
           <a:p>
             <a:pPr algn="ctr"/>
+            <a:endParaRPr/>
           </a:p>
         </p:txBody>
       </p:sp>
@@ -8463,6 +8590,7 @@
           <a:lstStyle/>
           <a:p>
             <a:pPr algn="ctr"/>
+            <a:endParaRPr/>
           </a:p>
         </p:txBody>
       </p:sp>
@@ -8816,6 +8944,7 @@
           <a:lstStyle/>
           <a:p>
             <a:pPr algn="ctr"/>
+            <a:endParaRPr/>
           </a:p>
         </p:txBody>
       </p:sp>
@@ -8989,7 +9118,7 @@
 </file>
 
 <file path=ppt/slides/slide8.xml><?xml version="1.0" encoding="utf-8"?>
-<p:sld xmlns:a="http://schemas.openxmlformats.org/drawingml/2006/main" xmlns:p="http://schemas.openxmlformats.org/presentationml/2006/main" xmlns:r="http://schemas.openxmlformats.org/officeDocument/2006/relationships">
+<p:sld xmlns:a="http://schemas.openxmlformats.org/drawingml/2006/main" xmlns:r="http://schemas.openxmlformats.org/officeDocument/2006/relationships" xmlns:p="http://schemas.openxmlformats.org/presentationml/2006/main">
   <p:cSld>
     <p:spTree>
       <p:nvGrpSpPr>
@@ -8997,7 +9126,14 @@
         <p:cNvGrpSpPr/>
         <p:nvPr/>
       </p:nvGrpSpPr>
-      <p:grpSpPr/>
+      <p:grpSpPr>
+        <a:xfrm>
+          <a:off x="0" y="0"/>
+          <a:ext cx="0" cy="0"/>
+          <a:chOff x="0" y="0"/>
+          <a:chExt cx="0" cy="0"/>
+        </a:xfrm>
+      </p:grpSpPr>
       <p:sp>
         <p:nvSpPr>
           <p:cNvPr id="2" name="Rectangle 1"/>
@@ -9038,6 +9174,7 @@
           <a:lstStyle/>
           <a:p>
             <a:pPr algn="ctr"/>
+            <a:endParaRPr/>
           </a:p>
         </p:txBody>
       </p:sp>
@@ -9153,6 +9290,7 @@
           <a:lstStyle/>
           <a:p>
             <a:pPr algn="ctr"/>
+            <a:endParaRPr/>
           </a:p>
         </p:txBody>
       </p:sp>
@@ -9256,6 +9394,7 @@
           <a:lstStyle/>
           <a:p>
             <a:pPr algn="ctr"/>
+            <a:endParaRPr/>
           </a:p>
         </p:txBody>
       </p:sp>
@@ -9323,6 +9462,7 @@
           <a:lstStyle/>
           <a:p>
             <a:pPr algn="ctr"/>
+            <a:endParaRPr/>
           </a:p>
         </p:txBody>
       </p:sp>
@@ -9390,6 +9530,7 @@
           <a:lstStyle/>
           <a:p>
             <a:pPr algn="ctr"/>
+            <a:endParaRPr/>
           </a:p>
         </p:txBody>
       </p:sp>
@@ -9457,6 +9598,7 @@
           <a:lstStyle/>
           <a:p>
             <a:pPr algn="ctr"/>
+            <a:endParaRPr/>
           </a:p>
         </p:txBody>
       </p:sp>
@@ -9502,6 +9644,7 @@
           <a:lstStyle/>
           <a:p>
             <a:pPr algn="ctr"/>
+            <a:endParaRPr/>
           </a:p>
         </p:txBody>
       </p:sp>
@@ -9675,7 +9818,7 @@
 </file>
 
 <file path=ppt/slides/slide9.xml><?xml version="1.0" encoding="utf-8"?>
-<p:sld xmlns:a="http://schemas.openxmlformats.org/drawingml/2006/main" xmlns:p="http://schemas.openxmlformats.org/presentationml/2006/main" xmlns:r="http://schemas.openxmlformats.org/officeDocument/2006/relationships">
+<p:sld xmlns:a="http://schemas.openxmlformats.org/drawingml/2006/main" xmlns:r="http://schemas.openxmlformats.org/officeDocument/2006/relationships" xmlns:p="http://schemas.openxmlformats.org/presentationml/2006/main">
   <p:cSld>
     <p:spTree>
       <p:nvGrpSpPr>
@@ -9683,7 +9826,14 @@
         <p:cNvGrpSpPr/>
         <p:nvPr/>
       </p:nvGrpSpPr>
-      <p:grpSpPr/>
+      <p:grpSpPr>
+        <a:xfrm>
+          <a:off x="0" y="0"/>
+          <a:ext cx="0" cy="0"/>
+          <a:chOff x="0" y="0"/>
+          <a:chExt cx="0" cy="0"/>
+        </a:xfrm>
+      </p:grpSpPr>
       <p:sp>
         <p:nvSpPr>
           <p:cNvPr id="2" name="Rectangle 1"/>
@@ -9724,6 +9874,7 @@
           <a:lstStyle/>
           <a:p>
             <a:pPr algn="ctr"/>
+            <a:endParaRPr/>
           </a:p>
         </p:txBody>
       </p:sp>
@@ -9839,6 +9990,7 @@
           <a:lstStyle/>
           <a:p>
             <a:pPr algn="ctr"/>
+            <a:endParaRPr/>
           </a:p>
         </p:txBody>
       </p:sp>
@@ -9920,6 +10072,7 @@
           <a:lstStyle/>
           <a:p>
             <a:pPr algn="ctr"/>
+            <a:endParaRPr/>
           </a:p>
         </p:txBody>
       </p:sp>
@@ -10014,6 +10167,7 @@
           <a:lstStyle/>
           <a:p>
             <a:pPr algn="ctr"/>
+            <a:endParaRPr/>
           </a:p>
         </p:txBody>
       </p:sp>
@@ -10108,6 +10262,7 @@
           <a:lstStyle/>
           <a:p>
             <a:pPr algn="ctr"/>
+            <a:endParaRPr/>
           </a:p>
         </p:txBody>
       </p:sp>
@@ -10202,6 +10357,7 @@
           <a:lstStyle/>
           <a:p>
             <a:pPr algn="ctr"/>
+            <a:endParaRPr/>
           </a:p>
         </p:txBody>
       </p:sp>
@@ -10296,6 +10452,7 @@
           <a:lstStyle/>
           <a:p>
             <a:pPr algn="ctr"/>
+            <a:endParaRPr/>
           </a:p>
         </p:txBody>
       </p:sp>
@@ -10390,6 +10547,7 @@
           <a:lstStyle/>
           <a:p>
             <a:pPr algn="ctr"/>
+            <a:endParaRPr/>
           </a:p>
         </p:txBody>
       </p:sp>
